--- a/proposal/02_First_Meeting_Presentation.pptx
+++ b/proposal/02_First_Meeting_Presentation.pptx
@@ -1575,7 +1575,7 @@
           <a:p>
             <a:r>
               <a:rPr lang="en-US" dirty="0"/>
-              <a:t>Emphasise that we took the human-approval requirement as a hard design constraint, not a feature toggle: there is no automated sending path in the system. Confirm the three categories and ask what is specific about their GCC pipeline (intermediaries, majlis meetings, regulatory steps), which we will configure rather than hard-code.</a:t>
+              <a:t>Emphasise that we took the human-approval requirement as a hard design constraint, not a feature toggle: there is no automated path to an external contact in the system; reminders go to staff only. Confirm the three categories and ask what is specific about their GCC pipeline (intermediaries, majlis meetings, regulatory steps), which we will configure rather than hard-code.</a:t>
             </a:r>
             <a:endParaRPr lang="en-US" dirty="0"/>
           </a:p>
@@ -2743,7 +2743,7 @@
                 <a:ea typeface="Calibri" pitchFamily="34" charset="-122"/>
                 <a:cs typeface="Calibri" pitchFamily="34" charset="-120"/>
               </a:rPr>
-              <a:t>The approval gate is enforced in the database, not just the screen: drafter cannot approve, and there is no scheduled-send path in the code</a:t>
+              <a:t>The approval gate is enforced in the database, not just the screen: drafter cannot approve, and there is no scheduled send to contacts anywhere in the code</a:t>
             </a:r>
             <a:endParaRPr lang="en-US" sz="1300" dirty="0"/>
           </a:p>

--- a/proposal/02_First_Meeting_Presentation.pptx
+++ b/proposal/02_First_Meeting_Presentation.pptx
@@ -695,7 +695,7 @@
           <a:p>
             <a:r>
               <a:rPr lang="en-US" dirty="0"/>
-              <a:t>Be precise here. Data at rest: your cloud account, a GCC region (AWS UAE or Bahrain, Azure UAE North, Google Cloud Dammam), or on premises. Data in processing: with Pattern A, only the passages needed for a question go to the model, encrypted, under enterprise terms that prohibit training. As of early 2026, Claude on AWS in the Middle East regions uses cross-region inference, so processing may transit outside the region; a fully in-country frontier endpoint was not confirmed and we will re-verify at discovery. Pattern B routes restricted and personal-data documents to an in-region model. Pattern C runs everything in country on open-weight models at higher cost. Recommendation: start on A for the demo, design for B, keep C as the upgrade path.</a:t>
+              <a:t>Be precise here, and do not overclaim. Data at rest: your own cloud account in Malaysia (AWS ap-southeast-5, opened 2024, or Azure Malaysia West, opened 2025), or on premises. Be straight about the Philippines: none of the major providers has a full region there, so Philippine data sits in Singapore or in Malaysia unless you host it yourselves. AWS has a Manila Local Zone but that is a latency extension of Singapore, not a region. Saying this plainly is worth more than a vague answer they will check later. Data in processing: with Pattern A, only the passages needed for a question go to the model, encrypted, under enterprise terms that prohibit training. As of early 2026, Claude on Bedrock uses cross-region inference, so processing may leave the country; a frontier endpoint pinned inside Malaysia or the Philippines was not confirmed and we will re-verify at discovery. Pattern B routes restricted and personal-data documents to an in-region model. Pattern C runs everything in one named country on open-weight models at higher cost. Recommendation: start on A for the demo, design for B, keep C as the upgrade path. If they ask about the GCC entity: same machinery, a different region setting, no rebuild.</a:t>
             </a:r>
             <a:endParaRPr lang="en-US" dirty="0"/>
           </a:p>
@@ -1399,7 +1399,7 @@
           <a:p>
             <a:r>
               <a:rPr lang="en-US" dirty="0"/>
-              <a:t>Walk the agenda in 30 seconds. Signal that section 3 (data and residency) is where you will be most candid, because it is the section where GCC clients most often get vague answers from vendors.</a:t>
+              <a:t>Walk the agenda in 30 seconds. Signal that section 3 (data and residency) is where you will be most candid, because it is the section where clients most often get vague answers from vendors.</a:t>
             </a:r>
             <a:endParaRPr lang="en-US" dirty="0"/>
           </a:p>
@@ -1487,7 +1487,7 @@
           <a:p>
             <a:r>
               <a:rPr lang="en-US" dirty="0"/>
-              <a:t>Read the four requirements back in the client's own words. Then ask: have we understood this correctly? Listen for anything new, for example additional document types, other user groups, or Arabic. Note it visibly. Do not move on until they confirm.</a:t>
+              <a:t>Read the four requirements back in the client's own words. Then ask: have we understood this correctly? Listen for anything new, for example additional document types, other user groups, or languages beyond English. Note it visibly. Do not move on until they confirm.</a:t>
             </a:r>
             <a:endParaRPr lang="en-US" dirty="0"/>
           </a:p>
@@ -1575,7 +1575,7 @@
           <a:p>
             <a:r>
               <a:rPr lang="en-US" dirty="0"/>
-              <a:t>Emphasise that we took the human-approval requirement as a hard design constraint, not a feature toggle: there is no automated path to an external contact in the system; reminders go to staff only. Confirm the three categories and ask what is specific about their GCC pipeline (intermediaries, majlis meetings, regulatory steps), which we will configure rather than hard-code.</a:t>
+              <a:t>Emphasise that we took the human-approval requirement as a hard design constraint, not a feature toggle: there is no automated path to an external contact in the system; reminders go to staff only. Confirm the three categories, and ask how a GCC relationship differs from one in Malaysia or the Philippines (intermediaries, longer trust-building, regulatory steps), which we will configure rather than hard-code.</a:t>
             </a:r>
             <a:endParaRPr lang="en-US" dirty="0"/>
           </a:p>
@@ -1839,7 +1839,7 @@
           <a:p>
             <a:r>
               <a:rPr lang="en-US" dirty="0"/>
-              <a:t>Two flows. Ingestion happens once per document: scan, classify, parse including OCR for scans in Arabic and English, chunk with page references, index, and extract claims. Answering happens per question: apply the user's permissions first, retrieve by keyword and by meaning, re-rank, draft an answer with citations, then the gold box: an independent grounding check that removes any sentence the sources do not support. If nothing survives, the assistant says the documents do not contain the answer. Everything is logged. Phrase: 'it shows its work, and a second check marks its homework'.</a:t>
+              <a:t>Two flows. Ingestion happens once per document: scan, classify, parse including OCR for scans in whatever languages the documents are in, chunk with page references, index, and extract claims. Answering happens per question: apply the user's permissions first, retrieve by keyword and by meaning, re-rank, draft an answer with citations, then the gold box: an independent grounding check that removes any sentence the sources do not support. If nothing survives, the assistant says the documents do not contain the answer. Everything is logged. Phrase: 'it shows its work, and a second check marks its homework'.</a:t>
             </a:r>
             <a:endParaRPr lang="en-US" dirty="0"/>
           </a:p>
@@ -1927,7 +1927,7 @@
           <a:p>
             <a:r>
               <a:rPr lang="en-US" dirty="0"/>
-              <a:t>This is the differentiator. Walk the example: the contract says AED 12.5m, the board memo says 11.8m, the financial model says 12.5m. Each becomes a row: entity, attribute, value, unit, page, exact quote. Comparing rows about the same entity and attribute finds the conflict, and the flag shows both quotes. Decision checklists (bottom) are configured once per decision type; the system marks evidence as present, missing or contradicted. Mention version handling: a superseded draft is not reported as a contradiction of the final.</a:t>
+              <a:t>This is the differentiator. Walk the example: the contract says MYR 12.5m, the board memo says 11.8m, the financial model says 12.5m. Each becomes a row: entity, attribute, value, unit, page, exact quote. Comparing rows about the same entity and attribute finds the conflict, and the flag shows both quotes. Decision checklists (bottom) are configured once per decision type; the system marks evidence as present, missing or contradicted. Mention version handling: a superseded draft is not reported as a contradiction of the final.</a:t>
             </a:r>
             <a:endParaRPr lang="en-US" dirty="0"/>
           </a:p>
@@ -2954,7 +2954,7 @@
                 <a:ea typeface="Calibri" pitchFamily="34" charset="-122"/>
                 <a:cs typeface="Calibri" pitchFamily="34" charset="-120"/>
               </a:rPr>
-              <a:t>Data at rest in a GCC region from day one; AI processing routed by classification; a fully sovereign option designed in</a:t>
+              <a:t>Data at rest in Malaysia from day one; AI processing routed by classification; a fully sovereign option designed in</a:t>
             </a:r>
             <a:endParaRPr lang="en-US" sz="1300" dirty="0"/>
           </a:p>
@@ -4017,7 +4017,7 @@
                 <a:ea typeface="Calibri" pitchFamily="34" charset="-122"/>
                 <a:cs typeface="Calibri" pitchFamily="34" charset="-120"/>
               </a:rPr>
-              <a:t>Consent and lawful basis per contact; residency per jurisdiction; retention and deletion; supports Saudi PDPL, UAE PDPL, DIFC and ADGM regimes.</a:t>
+              <a:t>Consent and lawful basis per contact; residency per jurisdiction; retention and deletion; built around the Malaysian PDPA as amended and the Philippine Data Privacy Act.</a:t>
             </a:r>
             <a:endParaRPr lang="en-US" sz="1050" dirty="0"/>
           </a:p>
@@ -7274,7 +7274,7 @@
                 <a:ea typeface="Calibri" pitchFamily="34" charset="-122"/>
                 <a:cs typeface="Calibri" pitchFamily="34" charset="-120"/>
               </a:rPr>
-              <a:t>50-200 sample documents under NDA: mixed formats, both languages, some scanned</a:t>
+              <a:t>50-200 sample documents under NDA: mixed formats, a spread of languages, some scanned</a:t>
             </a:r>
             <a:endParaRPr lang="en-US" sz="1150" dirty="0"/>
           </a:p>
@@ -7419,7 +7419,7 @@
                 <a:ea typeface="Calibri" pitchFamily="34" charset="-122"/>
                 <a:cs typeface="Calibri" pitchFamily="34" charset="-120"/>
               </a:rPr>
-              <a:t>Arabic-language documents and interface (we assume yes)</a:t>
+              <a:t>Which languages appear in your documents, and in what share</a:t>
             </a:r>
             <a:endParaRPr lang="en-US" sz="1150" dirty="0"/>
           </a:p>
@@ -7482,7 +7482,7 @@
                 <a:ea typeface="Calibri" pitchFamily="34" charset="-122"/>
                 <a:cs typeface="Calibri" pitchFamily="34" charset="-120"/>
               </a:rPr>
-              <a:t>Consent and lawful basis for investor personal data under GCC data protection laws</a:t>
+              <a:t>Whether Philippine personal data may be stored in Malaysia or Singapore</a:t>
             </a:r>
             <a:endParaRPr lang="en-US" sz="1150" dirty="0"/>
           </a:p>
@@ -8674,7 +8674,7 @@
                 <a:ea typeface="Calibri" pitchFamily="34" charset="-122"/>
                 <a:cs typeface="Calibri" pitchFamily="34" charset="-120"/>
               </a:rPr>
-              <a:t>Where data lives, who sees what, and the honest position on AI processing in the GCC.</a:t>
+              <a:t>Where data lives, who sees what, and the honest position on where AI processing actually happens.</a:t>
             </a:r>
             <a:endParaRPr lang="en-US" sz="1100" dirty="0"/>
           </a:p>
@@ -10060,7 +10060,7 @@
                 <a:ea typeface="Calibri" pitchFamily="34" charset="-122"/>
                 <a:cs typeface="Calibri" pitchFamily="34" charset="-120"/>
               </a:rPr>
-              <a:t>CRM + Follow-up System across investors, partners/counterparties and customers/members, with a GCC-specific pipeline</a:t>
+              <a:t>CRM + Follow-up System across investors, partners/counterparties and customers/members, with a GCC pipeline for the market you are entering</a:t>
             </a:r>
             <a:endParaRPr lang="en-US" sz="1300" dirty="0"/>
           </a:p>
@@ -11938,7 +11938,7 @@
                 <a:ea typeface="Calibri" pitchFamily="34" charset="-122"/>
                 <a:cs typeface="Calibri" pitchFamily="34" charset="-120"/>
               </a:rPr>
-              <a:t>Three categories with a GCC-specific path. Stages, SLAs and exit criteria are configuration; relationship managers see a board, leadership sees the whole picture</a:t>
+              <a:t>Three categories plus a GCC path for the market you are entering. Stages, SLAs and exit criteria are configuration; relationship managers see a board, leadership sees the whole picture</a:t>
             </a:r>
             <a:endParaRPr lang="en-US" sz="1300" dirty="0"/>
           </a:p>
@@ -12066,7 +12066,7 @@
                 <a:ea typeface="Calibri" pitchFamily="34" charset="-122"/>
                 <a:cs typeface="Calibri" pitchFamily="34" charset="-120"/>
               </a:rPr>
-              <a:t>First meeting / majlis</a:t>
+              <a:t>First meeting</a:t>
             </a:r>
             <a:endParaRPr lang="en-US" sz="750" dirty="0"/>
           </a:p>
